--- a/Williams_Pomodoro.pptx
+++ b/Williams_Pomodoro.pptx
@@ -273,7 +273,7 @@
           <a:p>
             <a:fld id="{6AD6EE87-EBD5-4F12-A48A-63ACA297AC8F}" type="datetimeFigureOut">
               <a:rPr lang="en-US" dirty="0"/>
-              <a:t>8/2/2026</a:t>
+              <a:t>8/3/2026</a:t>
             </a:fld>
             <a:endParaRPr lang="en-US" dirty="0"/>
           </a:p>
@@ -368,6 +368,13 @@
             <a:schemeClr val="lt1"/>
           </a:fontRef>
         </p:style>
+        <p:txBody>
+          <a:bodyPr/>
+          <a:lstStyle/>
+          <a:p>
+            <a:endParaRPr lang="en-US"/>
+          </a:p>
+        </p:txBody>
       </p:sp>
       <p:cxnSp>
         <p:nvCxnSpPr>
@@ -524,7 +531,7 @@
           <a:p>
             <a:fld id="{4CD73815-2707-4475-8F1A-B873CB631BB4}" type="datetimeFigureOut">
               <a:rPr lang="en-US" dirty="0"/>
-              <a:t>8/2/2026</a:t>
+              <a:t>8/3/2026</a:t>
             </a:fld>
             <a:endParaRPr lang="en-US" dirty="0"/>
           </a:p>
@@ -702,7 +709,7 @@
           <a:p>
             <a:fld id="{2A4AFB99-0EAB-4182-AFF8-E214C82A68F6}" type="datetimeFigureOut">
               <a:rPr lang="en-US" dirty="0"/>
-              <a:t>8/2/2026</a:t>
+              <a:t>8/3/2026</a:t>
             </a:fld>
             <a:endParaRPr lang="en-US" dirty="0"/>
           </a:p>
@@ -905,7 +912,7 @@
           <a:p>
             <a:fld id="{A5D3794B-289A-4A80-97D7-111025398D45}" type="datetimeFigureOut">
               <a:rPr lang="en-US" dirty="0"/>
-              <a:t>8/2/2026</a:t>
+              <a:t>8/3/2026</a:t>
             </a:fld>
             <a:endParaRPr lang="en-US" dirty="0"/>
           </a:p>
@@ -1161,7 +1168,7 @@
           <a:p>
             <a:fld id="{5A61015F-7CC6-4D0A-9D87-873EA4C304CC}" type="datetimeFigureOut">
               <a:rPr lang="en-US" dirty="0"/>
-              <a:t>8/2/2026</a:t>
+              <a:t>8/3/2026</a:t>
             </a:fld>
             <a:endParaRPr lang="en-US" dirty="0"/>
           </a:p>
@@ -1478,7 +1485,7 @@
           <a:p>
             <a:fld id="{93C6A301-0538-44EC-B09D-202E1042A48B}" type="datetimeFigureOut">
               <a:rPr lang="en-US" dirty="0"/>
-              <a:t>8/2/2026</a:t>
+              <a:t>8/3/2026</a:t>
             </a:fld>
             <a:endParaRPr lang="en-US" dirty="0"/>
           </a:p>
@@ -1873,7 +1880,7 @@
           <a:p>
             <a:fld id="{D789574A-8875-45EF-8EA2-3CAA0F7ABC4C}" type="datetimeFigureOut">
               <a:rPr lang="en-US" dirty="0"/>
-              <a:t>8/2/2026</a:t>
+              <a:t>8/3/2026</a:t>
             </a:fld>
             <a:endParaRPr lang="en-US" dirty="0"/>
           </a:p>
@@ -1990,7 +1997,7 @@
           <a:p>
             <a:fld id="{67EF4D4C-5367-4C26-9E2B-D8088D7FCA81}" type="datetimeFigureOut">
               <a:rPr lang="en-US" dirty="0"/>
-              <a:t>8/2/2026</a:t>
+              <a:t>8/3/2026</a:t>
             </a:fld>
             <a:endParaRPr lang="en-US" dirty="0"/>
           </a:p>
@@ -2085,7 +2092,7 @@
           <a:p>
             <a:fld id="{56E91E96-98B0-4413-9547-46F3504108EF}" type="datetimeFigureOut">
               <a:rPr lang="en-US" dirty="0"/>
-              <a:t>8/2/2026</a:t>
+              <a:t>8/3/2026</a:t>
             </a:fld>
             <a:endParaRPr lang="en-US" dirty="0"/>
           </a:p>
@@ -2373,7 +2380,7 @@
           <a:p>
             <a:fld id="{05C68B11-C5A8-448C-8CE9-B1A273C79CFC}" type="datetimeFigureOut">
               <a:rPr lang="en-US" dirty="0"/>
-              <a:t>8/2/2026</a:t>
+              <a:t>8/3/2026</a:t>
             </a:fld>
             <a:endParaRPr lang="en-US" dirty="0"/>
           </a:p>
@@ -2645,7 +2652,7 @@
           <a:p>
             <a:fld id="{C7616CA0-919D-4A49-9C8A-62FDFB3A5183}" type="datetimeFigureOut">
               <a:rPr lang="en-US" dirty="0"/>
-              <a:t>8/2/2026</a:t>
+              <a:t>8/3/2026</a:t>
             </a:fld>
             <a:endParaRPr lang="en-US" dirty="0"/>
           </a:p>
@@ -2894,7 +2901,7 @@
             <a:fld id="{90298CD5-6C1E-4009-B41F-6DF62E31D3BE}" type="datetimeFigureOut">
               <a:rPr lang="en-US" dirty="0"/>
               <a:pPr/>
-              <a:t>8/2/2026</a:t>
+              <a:t>8/3/2026</a:t>
             </a:fld>
             <a:endParaRPr lang="en-US" dirty="0"/>
           </a:p>
@@ -3589,6 +3596,36 @@
           </a:p>
         </p:txBody>
       </p:sp>
+      <p:pic>
+        <p:nvPicPr>
+          <p:cNvPr id="5" name="Picture 4">
+            <a:extLst>
+              <a:ext uri="{FF2B5EF4-FFF2-40B4-BE49-F238E27FC236}">
+                <a16:creationId xmlns:a16="http://schemas.microsoft.com/office/drawing/2014/main" id="{AF4A08E8-8CAA-6A5F-8E77-7BAED9F5A783}"/>
+              </a:ext>
+            </a:extLst>
+          </p:cNvPr>
+          <p:cNvPicPr>
+            <a:picLocks noChangeAspect="1"/>
+          </p:cNvPicPr>
+          <p:nvPr/>
+        </p:nvPicPr>
+        <p:blipFill>
+          <a:blip r:embed="rId2"/>
+          <a:stretch>
+            <a:fillRect/>
+          </a:stretch>
+        </p:blipFill>
+        <p:spPr>
+          <a:xfrm>
+            <a:off x="6932175" y="1903607"/>
+            <a:ext cx="4667490" cy="4788146"/>
+          </a:xfrm>
+          <a:prstGeom prst="rect">
+            <a:avLst/>
+          </a:prstGeom>
+        </p:spPr>
+      </p:pic>
     </p:spTree>
     <p:extLst>
       <p:ext uri="{BB962C8B-B14F-4D97-AF65-F5344CB8AC3E}">
@@ -3695,6 +3732,36 @@
           </a:p>
         </p:txBody>
       </p:sp>
+      <p:pic>
+        <p:nvPicPr>
+          <p:cNvPr id="5" name="Picture 4">
+            <a:extLst>
+              <a:ext uri="{FF2B5EF4-FFF2-40B4-BE49-F238E27FC236}">
+                <a16:creationId xmlns:a16="http://schemas.microsoft.com/office/drawing/2014/main" id="{DF8D43A0-0249-930D-00F4-188A3D67871E}"/>
+              </a:ext>
+            </a:extLst>
+          </p:cNvPr>
+          <p:cNvPicPr>
+            <a:picLocks noChangeAspect="1"/>
+          </p:cNvPicPr>
+          <p:nvPr/>
+        </p:nvPicPr>
+        <p:blipFill>
+          <a:blip r:embed="rId2"/>
+          <a:stretch>
+            <a:fillRect/>
+          </a:stretch>
+        </p:blipFill>
+        <p:spPr>
+          <a:xfrm>
+            <a:off x="6862351" y="860780"/>
+            <a:ext cx="4305521" cy="5448580"/>
+          </a:xfrm>
+          <a:prstGeom prst="rect">
+            <a:avLst/>
+          </a:prstGeom>
+        </p:spPr>
+      </p:pic>
     </p:spTree>
     <p:extLst>
       <p:ext uri="{BB962C8B-B14F-4D97-AF65-F5344CB8AC3E}">
